--- a/day2-deck/decks/Gross Trend - Review.pptx
+++ b/day2-deck/decks/Gross Trend - Review.pptx
@@ -5612,7 +5612,7 @@
         <p:spPr>
           <a:xfrm>
             <a:off x="457200" y="1207008"/>
-            <a:ext cx="7589520" cy="4617720"/>
+            <a:ext cx="7589520" cy="4782312"/>
           </a:xfrm>
           <a:prstGeom prst="rect">
             <a:avLst/>
@@ -5690,7 +5690,7 @@
         </p:nvGraphicFramePr>
         <p:xfrm>
           <a:off x="621792" y="1773936"/>
-          <a:ext cx="7260336" cy="3959352"/>
+          <a:ext cx="7260336" cy="4123944"/>
         </p:xfrm>
         <a:graphic xmlns:a="http://schemas.openxmlformats.org/drawingml/2006/main">
           <a:graphicData uri="http://schemas.openxmlformats.org/drawingml/2006/chart">
@@ -5707,7 +5707,7 @@
         <p:spPr>
           <a:xfrm>
             <a:off x="8229600" y="1207008"/>
-            <a:ext cx="3502152" cy="4617720"/>
+            <a:ext cx="3502152" cy="4782312"/>
           </a:xfrm>
           <a:prstGeom prst="rect">
             <a:avLst/>
@@ -5962,8 +5962,8 @@
         </p:nvSpPr>
         <p:spPr>
           <a:xfrm>
-            <a:off x="457200" y="5961888"/>
-            <a:ext cx="11274552" cy="548640"/>
+            <a:off x="457200" y="6126480"/>
+            <a:ext cx="11274552" cy="341376"/>
           </a:xfrm>
           <a:prstGeom prst="rect">
             <a:avLst/>
@@ -5982,8 +5982,8 @@
         </p:nvSpPr>
         <p:spPr>
           <a:xfrm>
-            <a:off x="658368" y="5980176"/>
-            <a:ext cx="10927080" cy="512064"/>
+            <a:off x="658368" y="6144768"/>
+            <a:ext cx="10927080" cy="304800"/>
           </a:xfrm>
           <a:prstGeom prst="rect">
             <a:avLst/>
@@ -5999,7 +5999,7 @@
               <a:buNone/>
             </a:pPr>
             <a:r>
-              <a:rPr lang="en-US" sz="1600" b="1" dirty="0">
+              <a:rPr lang="en-US" sz="1400" b="1" dirty="0">
                 <a:solidFill>
                   <a:srgbClr val="0B7A4A"/>
                 </a:solidFill>
@@ -6009,7 +6009,7 @@
               </a:rPr>
               <a:t>Fixed ops gross up $7,468,567 (4.1%) year to date; ahead of 2025 in 6 of 9 months, and in every month since June.</a:t>
             </a:r>
-            <a:endParaRPr lang="en-US" sz="1600" dirty="0"/>
+            <a:endParaRPr lang="en-US" sz="1400" dirty="0"/>
           </a:p>
         </p:txBody>
       </p:sp>
@@ -6523,7 +6523,7 @@
         <p:spPr>
           <a:xfrm>
             <a:off x="457200" y="2523744"/>
-            <a:ext cx="11274552" cy="3300984"/>
+            <a:ext cx="11274552" cy="3465576"/>
           </a:xfrm>
           <a:prstGeom prst="rect">
             <a:avLst/>
@@ -6601,7 +6601,7 @@
         </p:nvGraphicFramePr>
         <p:xfrm>
           <a:off x="621792" y="3090672"/>
-          <a:ext cx="10945368" cy="2642616"/>
+          <a:ext cx="10945368" cy="2807208"/>
         </p:xfrm>
         <a:graphic xmlns:a="http://schemas.openxmlformats.org/drawingml/2006/main">
           <a:graphicData uri="http://schemas.openxmlformats.org/drawingml/2006/chart">
@@ -6617,8 +6617,8 @@
         </p:nvSpPr>
         <p:spPr>
           <a:xfrm>
-            <a:off x="457200" y="5961888"/>
-            <a:ext cx="11274552" cy="548640"/>
+            <a:off x="457200" y="6126480"/>
+            <a:ext cx="11274552" cy="341376"/>
           </a:xfrm>
           <a:prstGeom prst="rect">
             <a:avLst/>
@@ -6637,8 +6637,8 @@
         </p:nvSpPr>
         <p:spPr>
           <a:xfrm>
-            <a:off x="658368" y="5980176"/>
-            <a:ext cx="10927080" cy="512064"/>
+            <a:off x="658368" y="6144768"/>
+            <a:ext cx="10927080" cy="304800"/>
           </a:xfrm>
           <a:prstGeom prst="rect">
             <a:avLst/>
@@ -6654,7 +6654,7 @@
               <a:buNone/>
             </a:pPr>
             <a:r>
-              <a:rPr lang="en-US" sz="1600" b="1" dirty="0">
+              <a:rPr lang="en-US" sz="1400" b="1" dirty="0">
                 <a:solidFill>
                   <a:srgbClr val="0B7A4A"/>
                 </a:solidFill>
@@ -6664,7 +6664,7 @@
               </a:rPr>
               <a:t>Fixed ops gross up $7,468,567 (4.1%) year to date; ahead of 2025 in 6 of 9 months, and in every month since June.</a:t>
             </a:r>
-            <a:endParaRPr lang="en-US" sz="1600" dirty="0"/>
+            <a:endParaRPr lang="en-US" sz="1400" dirty="0"/>
           </a:p>
         </p:txBody>
       </p:sp>
@@ -6807,7 +6807,7 @@
         <p:spPr>
           <a:xfrm>
             <a:off x="457200" y="1207008"/>
-            <a:ext cx="7589520" cy="4617720"/>
+            <a:ext cx="7589520" cy="4782312"/>
           </a:xfrm>
           <a:prstGeom prst="rect">
             <a:avLst/>
@@ -6885,7 +6885,7 @@
         </p:nvGraphicFramePr>
         <p:xfrm>
           <a:off x="621792" y="1773936"/>
-          <a:ext cx="7260336" cy="3959352"/>
+          <a:ext cx="7260336" cy="4123944"/>
         </p:xfrm>
         <a:graphic xmlns:a="http://schemas.openxmlformats.org/drawingml/2006/main">
           <a:graphicData uri="http://schemas.openxmlformats.org/drawingml/2006/chart">
@@ -6902,7 +6902,7 @@
         <p:spPr>
           <a:xfrm>
             <a:off x="8229600" y="1207008"/>
-            <a:ext cx="3502152" cy="4617720"/>
+            <a:ext cx="3502152" cy="4782312"/>
           </a:xfrm>
           <a:prstGeom prst="rect">
             <a:avLst/>
@@ -7157,8 +7157,8 @@
         </p:nvSpPr>
         <p:spPr>
           <a:xfrm>
-            <a:off x="457200" y="5961888"/>
-            <a:ext cx="11274552" cy="548640"/>
+            <a:off x="457200" y="6126480"/>
+            <a:ext cx="11274552" cy="371856"/>
           </a:xfrm>
           <a:prstGeom prst="rect">
             <a:avLst/>
@@ -7177,8 +7177,8 @@
         </p:nvSpPr>
         <p:spPr>
           <a:xfrm>
-            <a:off x="658368" y="5980176"/>
-            <a:ext cx="10927080" cy="512064"/>
+            <a:off x="658368" y="6144768"/>
+            <a:ext cx="10927080" cy="335280"/>
           </a:xfrm>
           <a:prstGeom prst="rect">
             <a:avLst/>
@@ -7738,7 +7738,7 @@
                 <a:gridCol w="2039112"/>
                 <a:gridCol w="2039112"/>
               </a:tblGrid>
-              <a:tr h="274320">
+              <a:tr h="317297">
                 <a:tc>
                   <a:txBody>
                     <a:bodyPr/>
@@ -8080,7 +8080,7 @@
                   </a:tcPr>
                 </a:tc>
               </a:tr>
-              <a:tr h="274320">
+              <a:tr h="317297">
                 <a:tc>
                   <a:txBody>
                     <a:bodyPr/>
@@ -8422,7 +8422,7 @@
                   </a:tcPr>
                 </a:tc>
               </a:tr>
-              <a:tr h="274320">
+              <a:tr h="317297">
                 <a:tc>
                   <a:txBody>
                     <a:bodyPr/>
@@ -8764,7 +8764,7 @@
                   </a:tcPr>
                 </a:tc>
               </a:tr>
-              <a:tr h="274320">
+              <a:tr h="317297">
                 <a:tc>
                   <a:txBody>
                     <a:bodyPr/>
@@ -9106,7 +9106,7 @@
                   </a:tcPr>
                 </a:tc>
               </a:tr>
-              <a:tr h="274320">
+              <a:tr h="317297">
                 <a:tc>
                   <a:txBody>
                     <a:bodyPr/>
@@ -9448,7 +9448,7 @@
                   </a:tcPr>
                 </a:tc>
               </a:tr>
-              <a:tr h="274320">
+              <a:tr h="317297">
                 <a:tc>
                   <a:txBody>
                     <a:bodyPr/>
@@ -9790,7 +9790,7 @@
                   </a:tcPr>
                 </a:tc>
               </a:tr>
-              <a:tr h="274320">
+              <a:tr h="317297">
                 <a:tc>
                   <a:txBody>
                     <a:bodyPr/>
@@ -10132,7 +10132,7 @@
                   </a:tcPr>
                 </a:tc>
               </a:tr>
-              <a:tr h="274320">
+              <a:tr h="317297">
                 <a:tc>
                   <a:txBody>
                     <a:bodyPr/>
@@ -10474,7 +10474,7 @@
                   </a:tcPr>
                 </a:tc>
               </a:tr>
-              <a:tr h="274320">
+              <a:tr h="317297">
                 <a:tc>
                   <a:txBody>
                     <a:bodyPr/>
@@ -10816,7 +10816,7 @@
                   </a:tcPr>
                 </a:tc>
               </a:tr>
-              <a:tr h="274320">
+              <a:tr h="317297">
                 <a:tc>
                   <a:txBody>
                     <a:bodyPr/>
@@ -11170,8 +11170,8 @@
         </p:nvSpPr>
         <p:spPr>
           <a:xfrm>
-            <a:off x="457200" y="5961888"/>
-            <a:ext cx="11274552" cy="548640"/>
+            <a:off x="457200" y="6126480"/>
+            <a:ext cx="11274552" cy="371856"/>
           </a:xfrm>
           <a:prstGeom prst="rect">
             <a:avLst/>
@@ -11190,8 +11190,8 @@
         </p:nvSpPr>
         <p:spPr>
           <a:xfrm>
-            <a:off x="658368" y="5980176"/>
-            <a:ext cx="10927080" cy="512064"/>
+            <a:off x="658368" y="6144768"/>
+            <a:ext cx="10927080" cy="335280"/>
           </a:xfrm>
           <a:prstGeom prst="rect">
             <a:avLst/>
@@ -11360,7 +11360,7 @@
         <p:spPr>
           <a:xfrm>
             <a:off x="457200" y="1207008"/>
-            <a:ext cx="7589520" cy="4617720"/>
+            <a:ext cx="7589520" cy="4782312"/>
           </a:xfrm>
           <a:prstGeom prst="rect">
             <a:avLst/>
@@ -11438,7 +11438,7 @@
         </p:nvGraphicFramePr>
         <p:xfrm>
           <a:off x="621792" y="1773936"/>
-          <a:ext cx="7260336" cy="3959352"/>
+          <a:ext cx="7260336" cy="4123944"/>
         </p:xfrm>
         <a:graphic xmlns:a="http://schemas.openxmlformats.org/drawingml/2006/main">
           <a:graphicData uri="http://schemas.openxmlformats.org/drawingml/2006/chart">
@@ -11455,7 +11455,7 @@
         <p:spPr>
           <a:xfrm>
             <a:off x="8229600" y="1207008"/>
-            <a:ext cx="3502152" cy="4617720"/>
+            <a:ext cx="3502152" cy="4782312"/>
           </a:xfrm>
           <a:prstGeom prst="rect">
             <a:avLst/>
@@ -11710,8 +11710,8 @@
         </p:nvSpPr>
         <p:spPr>
           <a:xfrm>
-            <a:off x="457200" y="5961888"/>
-            <a:ext cx="11274552" cy="548640"/>
+            <a:off x="457200" y="6126480"/>
+            <a:ext cx="11274552" cy="371856"/>
           </a:xfrm>
           <a:prstGeom prst="rect">
             <a:avLst/>
@@ -11730,8 +11730,8 @@
         </p:nvSpPr>
         <p:spPr>
           <a:xfrm>
-            <a:off x="658368" y="5980176"/>
-            <a:ext cx="10927080" cy="512064"/>
+            <a:off x="658368" y="6144768"/>
+            <a:ext cx="10927080" cy="335280"/>
           </a:xfrm>
           <a:prstGeom prst="rect">
             <a:avLst/>
@@ -12291,7 +12291,7 @@
                 <a:gridCol w="2039112"/>
                 <a:gridCol w="2039112"/>
               </a:tblGrid>
-              <a:tr h="274320">
+              <a:tr h="317297">
                 <a:tc>
                   <a:txBody>
                     <a:bodyPr/>
@@ -12633,7 +12633,7 @@
                   </a:tcPr>
                 </a:tc>
               </a:tr>
-              <a:tr h="274320">
+              <a:tr h="317297">
                 <a:tc>
                   <a:txBody>
                     <a:bodyPr/>
@@ -12975,7 +12975,7 @@
                   </a:tcPr>
                 </a:tc>
               </a:tr>
-              <a:tr h="274320">
+              <a:tr h="317297">
                 <a:tc>
                   <a:txBody>
                     <a:bodyPr/>
@@ -13317,7 +13317,7 @@
                   </a:tcPr>
                 </a:tc>
               </a:tr>
-              <a:tr h="274320">
+              <a:tr h="317297">
                 <a:tc>
                   <a:txBody>
                     <a:bodyPr/>
@@ -13659,7 +13659,7 @@
                   </a:tcPr>
                 </a:tc>
               </a:tr>
-              <a:tr h="274320">
+              <a:tr h="317297">
                 <a:tc>
                   <a:txBody>
                     <a:bodyPr/>
@@ -14001,7 +14001,7 @@
                   </a:tcPr>
                 </a:tc>
               </a:tr>
-              <a:tr h="274320">
+              <a:tr h="317297">
                 <a:tc>
                   <a:txBody>
                     <a:bodyPr/>
@@ -14343,7 +14343,7 @@
                   </a:tcPr>
                 </a:tc>
               </a:tr>
-              <a:tr h="274320">
+              <a:tr h="317297">
                 <a:tc>
                   <a:txBody>
                     <a:bodyPr/>
@@ -14685,7 +14685,7 @@
                   </a:tcPr>
                 </a:tc>
               </a:tr>
-              <a:tr h="274320">
+              <a:tr h="317297">
                 <a:tc>
                   <a:txBody>
                     <a:bodyPr/>
@@ -15027,7 +15027,7 @@
                   </a:tcPr>
                 </a:tc>
               </a:tr>
-              <a:tr h="274320">
+              <a:tr h="317297">
                 <a:tc>
                   <a:txBody>
                     <a:bodyPr/>
@@ -15369,7 +15369,7 @@
                   </a:tcPr>
                 </a:tc>
               </a:tr>
-              <a:tr h="274320">
+              <a:tr h="317297">
                 <a:tc>
                   <a:txBody>
                     <a:bodyPr/>
@@ -15723,8 +15723,8 @@
         </p:nvSpPr>
         <p:spPr>
           <a:xfrm>
-            <a:off x="457200" y="5961888"/>
-            <a:ext cx="11274552" cy="548640"/>
+            <a:off x="457200" y="6126480"/>
+            <a:ext cx="11274552" cy="371856"/>
           </a:xfrm>
           <a:prstGeom prst="rect">
             <a:avLst/>
@@ -15743,8 +15743,8 @@
         </p:nvSpPr>
         <p:spPr>
           <a:xfrm>
-            <a:off x="658368" y="5980176"/>
-            <a:ext cx="10927080" cy="512064"/>
+            <a:off x="658368" y="6144768"/>
+            <a:ext cx="10927080" cy="335280"/>
           </a:xfrm>
           <a:prstGeom prst="rect">
             <a:avLst/>
@@ -15913,7 +15913,7 @@
         <p:spPr>
           <a:xfrm>
             <a:off x="457200" y="1207008"/>
-            <a:ext cx="7589520" cy="4617720"/>
+            <a:ext cx="7589520" cy="4782312"/>
           </a:xfrm>
           <a:prstGeom prst="rect">
             <a:avLst/>
@@ -15991,7 +15991,7 @@
         </p:nvGraphicFramePr>
         <p:xfrm>
           <a:off x="621792" y="1773936"/>
-          <a:ext cx="7260336" cy="3959352"/>
+          <a:ext cx="7260336" cy="4123944"/>
         </p:xfrm>
         <a:graphic xmlns:a="http://schemas.openxmlformats.org/drawingml/2006/main">
           <a:graphicData uri="http://schemas.openxmlformats.org/drawingml/2006/chart">
@@ -16008,7 +16008,7 @@
         <p:spPr>
           <a:xfrm>
             <a:off x="8229600" y="1207008"/>
-            <a:ext cx="3502152" cy="4617720"/>
+            <a:ext cx="3502152" cy="4782312"/>
           </a:xfrm>
           <a:prstGeom prst="rect">
             <a:avLst/>
@@ -16263,8 +16263,8 @@
         </p:nvSpPr>
         <p:spPr>
           <a:xfrm>
-            <a:off x="457200" y="5961888"/>
-            <a:ext cx="11274552" cy="548640"/>
+            <a:off x="457200" y="6126480"/>
+            <a:ext cx="11274552" cy="348996"/>
           </a:xfrm>
           <a:prstGeom prst="rect">
             <a:avLst/>
@@ -16283,8 +16283,8 @@
         </p:nvSpPr>
         <p:spPr>
           <a:xfrm>
-            <a:off x="658368" y="5980176"/>
-            <a:ext cx="10927080" cy="512064"/>
+            <a:off x="658368" y="6144768"/>
+            <a:ext cx="10927080" cy="312420"/>
           </a:xfrm>
           <a:prstGeom prst="rect">
             <a:avLst/>
@@ -16300,7 +16300,7 @@
               <a:buNone/>
             </a:pPr>
             <a:r>
-              <a:rPr lang="en-US" sz="1600" b="1" dirty="0">
+              <a:rPr lang="en-US" sz="1450" b="1" dirty="0">
                 <a:solidFill>
                   <a:srgbClr val="0B7A4A"/>
                 </a:solidFill>
@@ -16310,7 +16310,7 @@
               </a:rPr>
               <a:t>Parts gross up $1,171,181 (1.9%) year to date; ahead of 2025 in 6 of 9 months, and in every month since June.</a:t>
             </a:r>
-            <a:endParaRPr lang="en-US" sz="1600" dirty="0"/>
+            <a:endParaRPr lang="en-US" sz="1450" dirty="0"/>
           </a:p>
         </p:txBody>
       </p:sp>
@@ -16844,7 +16844,7 @@
                 <a:gridCol w="2039112"/>
                 <a:gridCol w="2039112"/>
               </a:tblGrid>
-              <a:tr h="274320">
+              <a:tr h="317297">
                 <a:tc>
                   <a:txBody>
                     <a:bodyPr/>
@@ -17186,7 +17186,7 @@
                   </a:tcPr>
                 </a:tc>
               </a:tr>
-              <a:tr h="274320">
+              <a:tr h="317297">
                 <a:tc>
                   <a:txBody>
                     <a:bodyPr/>
@@ -17528,7 +17528,7 @@
                   </a:tcPr>
                 </a:tc>
               </a:tr>
-              <a:tr h="274320">
+              <a:tr h="317297">
                 <a:tc>
                   <a:txBody>
                     <a:bodyPr/>
@@ -17870,7 +17870,7 @@
                   </a:tcPr>
                 </a:tc>
               </a:tr>
-              <a:tr h="274320">
+              <a:tr h="317297">
                 <a:tc>
                   <a:txBody>
                     <a:bodyPr/>
@@ -18212,7 +18212,7 @@
                   </a:tcPr>
                 </a:tc>
               </a:tr>
-              <a:tr h="274320">
+              <a:tr h="317297">
                 <a:tc>
                   <a:txBody>
                     <a:bodyPr/>
@@ -18554,7 +18554,7 @@
                   </a:tcPr>
                 </a:tc>
               </a:tr>
-              <a:tr h="274320">
+              <a:tr h="317297">
                 <a:tc>
                   <a:txBody>
                     <a:bodyPr/>
@@ -18896,7 +18896,7 @@
                   </a:tcPr>
                 </a:tc>
               </a:tr>
-              <a:tr h="274320">
+              <a:tr h="317297">
                 <a:tc>
                   <a:txBody>
                     <a:bodyPr/>
@@ -19238,7 +19238,7 @@
                   </a:tcPr>
                 </a:tc>
               </a:tr>
-              <a:tr h="274320">
+              <a:tr h="317297">
                 <a:tc>
                   <a:txBody>
                     <a:bodyPr/>
@@ -19580,7 +19580,7 @@
                   </a:tcPr>
                 </a:tc>
               </a:tr>
-              <a:tr h="274320">
+              <a:tr h="317297">
                 <a:tc>
                   <a:txBody>
                     <a:bodyPr/>
@@ -19922,7 +19922,7 @@
                   </a:tcPr>
                 </a:tc>
               </a:tr>
-              <a:tr h="274320">
+              <a:tr h="317297">
                 <a:tc>
                   <a:txBody>
                     <a:bodyPr/>
@@ -20276,8 +20276,8 @@
         </p:nvSpPr>
         <p:spPr>
           <a:xfrm>
-            <a:off x="457200" y="5961888"/>
-            <a:ext cx="11274552" cy="548640"/>
+            <a:off x="457200" y="6126480"/>
+            <a:ext cx="11274552" cy="371856"/>
           </a:xfrm>
           <a:prstGeom prst="rect">
             <a:avLst/>
@@ -20296,8 +20296,8 @@
         </p:nvSpPr>
         <p:spPr>
           <a:xfrm>
-            <a:off x="658368" y="5980176"/>
-            <a:ext cx="10927080" cy="512064"/>
+            <a:off x="658368" y="6144768"/>
+            <a:ext cx="10927080" cy="335280"/>
           </a:xfrm>
           <a:prstGeom prst="rect">
             <a:avLst/>
@@ -20837,7 +20837,7 @@
         <p:spPr>
           <a:xfrm>
             <a:off x="457200" y="2523744"/>
-            <a:ext cx="11274552" cy="3300984"/>
+            <a:ext cx="11274552" cy="3465576"/>
           </a:xfrm>
           <a:prstGeom prst="rect">
             <a:avLst/>
@@ -20915,7 +20915,7 @@
         </p:nvGraphicFramePr>
         <p:xfrm>
           <a:off x="621792" y="3090672"/>
-          <a:ext cx="10945368" cy="2642616"/>
+          <a:ext cx="10945368" cy="2807208"/>
         </p:xfrm>
         <a:graphic xmlns:a="http://schemas.openxmlformats.org/drawingml/2006/main">
           <a:graphicData uri="http://schemas.openxmlformats.org/drawingml/2006/chart">
@@ -20931,8 +20931,8 @@
         </p:nvSpPr>
         <p:spPr>
           <a:xfrm>
-            <a:off x="457200" y="5961888"/>
-            <a:ext cx="11274552" cy="548640"/>
+            <a:off x="457200" y="6126480"/>
+            <a:ext cx="11274552" cy="341376"/>
           </a:xfrm>
           <a:prstGeom prst="rect">
             <a:avLst/>
@@ -20951,8 +20951,8 @@
         </p:nvSpPr>
         <p:spPr>
           <a:xfrm>
-            <a:off x="658368" y="5980176"/>
-            <a:ext cx="10927080" cy="512064"/>
+            <a:off x="658368" y="6144768"/>
+            <a:ext cx="10927080" cy="304800"/>
           </a:xfrm>
           <a:prstGeom prst="rect">
             <a:avLst/>
@@ -20968,7 +20968,7 @@
               <a:buNone/>
             </a:pPr>
             <a:r>
-              <a:rPr lang="en-US" sz="1600" b="1" dirty="0">
+              <a:rPr lang="en-US" sz="1400" b="1" dirty="0">
                 <a:solidFill>
                   <a:srgbClr val="0B7A4A"/>
                 </a:solidFill>
@@ -20978,7 +20978,7 @@
               </a:rPr>
               <a:t>Fixed ops gross up $7,468,567 (4.1%) year to date; ahead of 2025 in 6 of 9 months, and in every month since June.</a:t>
             </a:r>
-            <a:endParaRPr lang="en-US" sz="1600" dirty="0"/>
+            <a:endParaRPr lang="en-US" sz="1400" dirty="0"/>
           </a:p>
         </p:txBody>
       </p:sp>
@@ -21492,7 +21492,7 @@
         <p:spPr>
           <a:xfrm>
             <a:off x="457200" y="2523744"/>
-            <a:ext cx="11274552" cy="3300984"/>
+            <a:ext cx="11274552" cy="3465576"/>
           </a:xfrm>
           <a:prstGeom prst="rect">
             <a:avLst/>
@@ -21570,7 +21570,7 @@
         </p:nvGraphicFramePr>
         <p:xfrm>
           <a:off x="621792" y="3090672"/>
-          <a:ext cx="10945368" cy="2642616"/>
+          <a:ext cx="10945368" cy="2807208"/>
         </p:xfrm>
         <a:graphic xmlns:a="http://schemas.openxmlformats.org/drawingml/2006/main">
           <a:graphicData uri="http://schemas.openxmlformats.org/drawingml/2006/chart">
@@ -21586,8 +21586,8 @@
         </p:nvSpPr>
         <p:spPr>
           <a:xfrm>
-            <a:off x="457200" y="5961888"/>
-            <a:ext cx="11274552" cy="548640"/>
+            <a:off x="457200" y="6126480"/>
+            <a:ext cx="11274552" cy="371856"/>
           </a:xfrm>
           <a:prstGeom prst="rect">
             <a:avLst/>
@@ -21606,8 +21606,8 @@
         </p:nvSpPr>
         <p:spPr>
           <a:xfrm>
-            <a:off x="658368" y="5980176"/>
-            <a:ext cx="10927080" cy="512064"/>
+            <a:off x="658368" y="6144768"/>
+            <a:ext cx="10927080" cy="335280"/>
           </a:xfrm>
           <a:prstGeom prst="rect">
             <a:avLst/>
@@ -22147,7 +22147,7 @@
         <p:spPr>
           <a:xfrm>
             <a:off x="457200" y="2523744"/>
-            <a:ext cx="11274552" cy="3300984"/>
+            <a:ext cx="11274552" cy="3465576"/>
           </a:xfrm>
           <a:prstGeom prst="rect">
             <a:avLst/>
@@ -22225,7 +22225,7 @@
         </p:nvGraphicFramePr>
         <p:xfrm>
           <a:off x="621792" y="3090672"/>
-          <a:ext cx="10945368" cy="2642616"/>
+          <a:ext cx="10945368" cy="2807208"/>
         </p:xfrm>
         <a:graphic xmlns:a="http://schemas.openxmlformats.org/drawingml/2006/main">
           <a:graphicData uri="http://schemas.openxmlformats.org/drawingml/2006/chart">
@@ -22241,8 +22241,8 @@
         </p:nvSpPr>
         <p:spPr>
           <a:xfrm>
-            <a:off x="457200" y="5961888"/>
-            <a:ext cx="11274552" cy="548640"/>
+            <a:off x="457200" y="6126480"/>
+            <a:ext cx="11274552" cy="348996"/>
           </a:xfrm>
           <a:prstGeom prst="rect">
             <a:avLst/>
@@ -22261,8 +22261,8 @@
         </p:nvSpPr>
         <p:spPr>
           <a:xfrm>
-            <a:off x="658368" y="5980176"/>
-            <a:ext cx="10927080" cy="512064"/>
+            <a:off x="658368" y="6144768"/>
+            <a:ext cx="10927080" cy="312420"/>
           </a:xfrm>
           <a:prstGeom prst="rect">
             <a:avLst/>
@@ -22278,7 +22278,7 @@
               <a:buNone/>
             </a:pPr>
             <a:r>
-              <a:rPr lang="en-US" sz="1600" b="1" dirty="0">
+              <a:rPr lang="en-US" sz="1450" b="1" dirty="0">
                 <a:solidFill>
                   <a:srgbClr val="0B7A4A"/>
                 </a:solidFill>
@@ -22288,7 +22288,7 @@
               </a:rPr>
               <a:t>Parts gross up $1,171,181 (1.9%) year to date; ahead of 2025 in 6 of 9 months, and in every month since June.</a:t>
             </a:r>
-            <a:endParaRPr lang="en-US" sz="1600" dirty="0"/>
+            <a:endParaRPr lang="en-US" sz="1450" dirty="0"/>
           </a:p>
         </p:txBody>
       </p:sp>
